--- a/powerpoint/Presentazione_elaborato_tesi.pptx
+++ b/powerpoint/Presentazione_elaborato_tesi.pptx
@@ -5,7 +5,7 @@
     <p:sldMasterId id="2147483648" r:id="rId1"/>
   </p:sldMasterIdLst>
   <p:notesMasterIdLst>
-    <p:notesMasterId r:id="rId14"/>
+    <p:notesMasterId r:id="rId16"/>
   </p:notesMasterIdLst>
   <p:sldIdLst>
     <p:sldId id="256" r:id="rId2"/>
@@ -20,6 +20,8 @@
     <p:sldId id="266" r:id="rId11"/>
     <p:sldId id="267" r:id="rId12"/>
     <p:sldId id="268" r:id="rId13"/>
+    <p:sldId id="269" r:id="rId14"/>
+    <p:sldId id="270" r:id="rId15"/>
   </p:sldIdLst>
   <p:sldSz cx="12192000" cy="6858000"/>
   <p:notesSz cx="6858000" cy="9144000"/>
@@ -248,7 +250,7 @@
           <a:p>
             <a:fld id="{C608F994-3674-4470-AD9F-B1E60A8EF5E8}" type="datetimeFigureOut">
               <a:rPr lang="it-IT" smtClean="0"/>
-              <a:t>13/07/2024</a:t>
+              <a:t>15/07/2024</a:t>
             </a:fld>
             <a:endParaRPr lang="it-IT"/>
           </a:p>
@@ -662,7 +664,7 @@
           <a:p>
             <a:fld id="{3AE5005F-191D-47E6-8994-127EBC0434F6}" type="datetimeFigureOut">
               <a:rPr lang="it-IT" smtClean="0"/>
-              <a:t>13/07/2024</a:t>
+              <a:t>15/07/2024</a:t>
             </a:fld>
             <a:endParaRPr lang="it-IT"/>
           </a:p>
@@ -872,7 +874,7 @@
           <a:p>
             <a:fld id="{3AE5005F-191D-47E6-8994-127EBC0434F6}" type="datetimeFigureOut">
               <a:rPr lang="it-IT" smtClean="0"/>
-              <a:t>13/07/2024</a:t>
+              <a:t>15/07/2024</a:t>
             </a:fld>
             <a:endParaRPr lang="it-IT"/>
           </a:p>
@@ -1092,7 +1094,7 @@
           <a:p>
             <a:fld id="{3AE5005F-191D-47E6-8994-127EBC0434F6}" type="datetimeFigureOut">
               <a:rPr lang="it-IT" smtClean="0"/>
-              <a:t>13/07/2024</a:t>
+              <a:t>15/07/2024</a:t>
             </a:fld>
             <a:endParaRPr lang="it-IT"/>
           </a:p>
@@ -1302,7 +1304,7 @@
           <a:p>
             <a:fld id="{3AE5005F-191D-47E6-8994-127EBC0434F6}" type="datetimeFigureOut">
               <a:rPr lang="it-IT" smtClean="0"/>
-              <a:t>13/07/2024</a:t>
+              <a:t>15/07/2024</a:t>
             </a:fld>
             <a:endParaRPr lang="it-IT"/>
           </a:p>
@@ -1589,7 +1591,7 @@
           <a:p>
             <a:fld id="{3AE5005F-191D-47E6-8994-127EBC0434F6}" type="datetimeFigureOut">
               <a:rPr lang="it-IT" smtClean="0"/>
-              <a:t>13/07/2024</a:t>
+              <a:t>15/07/2024</a:t>
             </a:fld>
             <a:endParaRPr lang="it-IT"/>
           </a:p>
@@ -1866,7 +1868,7 @@
           <a:p>
             <a:fld id="{3AE5005F-191D-47E6-8994-127EBC0434F6}" type="datetimeFigureOut">
               <a:rPr lang="it-IT" smtClean="0"/>
-              <a:t>13/07/2024</a:t>
+              <a:t>15/07/2024</a:t>
             </a:fld>
             <a:endParaRPr lang="it-IT"/>
           </a:p>
@@ -2290,7 +2292,7 @@
           <a:p>
             <a:fld id="{3AE5005F-191D-47E6-8994-127EBC0434F6}" type="datetimeFigureOut">
               <a:rPr lang="it-IT" smtClean="0"/>
-              <a:t>13/07/2024</a:t>
+              <a:t>15/07/2024</a:t>
             </a:fld>
             <a:endParaRPr lang="it-IT"/>
           </a:p>
@@ -2443,7 +2445,7 @@
           <a:p>
             <a:fld id="{3AE5005F-191D-47E6-8994-127EBC0434F6}" type="datetimeFigureOut">
               <a:rPr lang="it-IT" smtClean="0"/>
-              <a:t>13/07/2024</a:t>
+              <a:t>15/07/2024</a:t>
             </a:fld>
             <a:endParaRPr lang="it-IT"/>
           </a:p>
@@ -2568,7 +2570,7 @@
           <a:p>
             <a:fld id="{3AE5005F-191D-47E6-8994-127EBC0434F6}" type="datetimeFigureOut">
               <a:rPr lang="it-IT" smtClean="0"/>
-              <a:t>13/07/2024</a:t>
+              <a:t>15/07/2024</a:t>
             </a:fld>
             <a:endParaRPr lang="it-IT"/>
           </a:p>
@@ -2891,7 +2893,7 @@
           <a:p>
             <a:fld id="{3AE5005F-191D-47E6-8994-127EBC0434F6}" type="datetimeFigureOut">
               <a:rPr lang="it-IT" smtClean="0"/>
-              <a:t>13/07/2024</a:t>
+              <a:t>15/07/2024</a:t>
             </a:fld>
             <a:endParaRPr lang="it-IT"/>
           </a:p>
@@ -3191,7 +3193,7 @@
           <a:p>
             <a:fld id="{3AE5005F-191D-47E6-8994-127EBC0434F6}" type="datetimeFigureOut">
               <a:rPr lang="it-IT" smtClean="0"/>
-              <a:t>13/07/2024</a:t>
+              <a:t>15/07/2024</a:t>
             </a:fld>
             <a:endParaRPr lang="it-IT"/>
           </a:p>
@@ -3447,7 +3449,7 @@
           <a:p>
             <a:fld id="{3AE5005F-191D-47E6-8994-127EBC0434F6}" type="datetimeFigureOut">
               <a:rPr lang="it-IT" smtClean="0"/>
-              <a:t>13/07/2024</a:t>
+              <a:t>15/07/2024</a:t>
             </a:fld>
             <a:endParaRPr lang="it-IT"/>
           </a:p>
@@ -5207,6 +5209,560 @@
 </p:sld>
 </file>
 
+<file path=ppt/slides/slide13.xml><?xml version="1.0" encoding="utf-8"?>
+<p:sld xmlns:a="http://schemas.openxmlformats.org/drawingml/2006/main" xmlns:r="http://schemas.openxmlformats.org/officeDocument/2006/relationships" xmlns:p="http://schemas.openxmlformats.org/presentationml/2006/main">
+  <p:cSld>
+    <p:spTree>
+      <p:nvGrpSpPr>
+        <p:cNvPr id="1" name=""/>
+        <p:cNvGrpSpPr/>
+        <p:nvPr/>
+      </p:nvGrpSpPr>
+      <p:grpSpPr>
+        <a:xfrm>
+          <a:off x="0" y="0"/>
+          <a:ext cx="0" cy="0"/>
+          <a:chOff x="0" y="0"/>
+          <a:chExt cx="0" cy="0"/>
+        </a:xfrm>
+      </p:grpSpPr>
+      <p:sp>
+        <p:nvSpPr>
+          <p:cNvPr id="2" name="CasellaDiTesto 1">
+            <a:extLst>
+              <a:ext uri="{FF2B5EF4-FFF2-40B4-BE49-F238E27FC236}">
+                <a16:creationId xmlns:a16="http://schemas.microsoft.com/office/drawing/2014/main" id="{22C82839-B1B7-A781-B5F8-C390D9565F10}"/>
+              </a:ext>
+            </a:extLst>
+          </p:cNvPr>
+          <p:cNvSpPr txBox="1"/>
+          <p:nvPr/>
+        </p:nvSpPr>
+        <p:spPr>
+          <a:xfrm>
+            <a:off x="1431636" y="0"/>
+            <a:ext cx="9328727" cy="646331"/>
+          </a:xfrm>
+          <a:prstGeom prst="rect">
+            <a:avLst/>
+          </a:prstGeom>
+          <a:noFill/>
+        </p:spPr>
+        <p:txBody>
+          <a:bodyPr wrap="square">
+            <a:spAutoFit/>
+          </a:bodyPr>
+          <a:lstStyle/>
+          <a:p>
+            <a:pPr algn="ctr"/>
+            <a:r>
+              <a:rPr lang="en-GB" sz="3600" dirty="0">
+                <a:ea typeface="Calibri" panose="020F0502020204030204" pitchFamily="34" charset="0"/>
+              </a:rPr>
+              <a:t>Conclusion: </a:t>
+            </a:r>
+            <a:r>
+              <a:rPr lang="en-GB" sz="3600" dirty="0" err="1">
+                <a:ea typeface="Calibri" panose="020F0502020204030204" pitchFamily="34" charset="0"/>
+              </a:rPr>
+              <a:t>multidisciplinarity</a:t>
+            </a:r>
+            <a:endParaRPr lang="it-IT" sz="3600" dirty="0"/>
+          </a:p>
+        </p:txBody>
+      </p:sp>
+      <p:pic>
+        <p:nvPicPr>
+          <p:cNvPr id="4" name="Immagine 3" descr="Immagine che contiene testo, diagramma, schermata, Piano&#10;&#10;Descrizione generata automaticamente">
+            <a:extLst>
+              <a:ext uri="{FF2B5EF4-FFF2-40B4-BE49-F238E27FC236}">
+                <a16:creationId xmlns:a16="http://schemas.microsoft.com/office/drawing/2014/main" id="{291BCBD9-4B64-E0C0-BC4F-67CAA07EBA20}"/>
+              </a:ext>
+            </a:extLst>
+          </p:cNvPr>
+          <p:cNvPicPr>
+            <a:picLocks noChangeAspect="1"/>
+          </p:cNvPicPr>
+          <p:nvPr/>
+        </p:nvPicPr>
+        <p:blipFill>
+          <a:blip r:embed="rId2">
+            <a:extLst>
+              <a:ext uri="{28A0092B-C50C-407E-A947-70E740481C1C}">
+                <a14:useLocalDpi xmlns:a14="http://schemas.microsoft.com/office/drawing/2010/main" val="0"/>
+              </a:ext>
+            </a:extLst>
+          </a:blip>
+          <a:stretch>
+            <a:fillRect/>
+          </a:stretch>
+        </p:blipFill>
+        <p:spPr>
+          <a:xfrm>
+            <a:off x="4438226" y="840126"/>
+            <a:ext cx="3477181" cy="1746653"/>
+          </a:xfrm>
+          <a:prstGeom prst="rect">
+            <a:avLst/>
+          </a:prstGeom>
+        </p:spPr>
+      </p:pic>
+      <p:pic>
+        <p:nvPicPr>
+          <p:cNvPr id="5" name="Immagine 4" descr="Immagine che contiene testo, linea, schermata, Diagramma&#10;&#10;Descrizione generata automaticamente">
+            <a:extLst>
+              <a:ext uri="{FF2B5EF4-FFF2-40B4-BE49-F238E27FC236}">
+                <a16:creationId xmlns:a16="http://schemas.microsoft.com/office/drawing/2014/main" id="{7729A316-1373-7290-484C-5D2D5186BCEA}"/>
+              </a:ext>
+            </a:extLst>
+          </p:cNvPr>
+          <p:cNvPicPr>
+            <a:picLocks noChangeAspect="1"/>
+          </p:cNvPicPr>
+          <p:nvPr/>
+        </p:nvPicPr>
+        <p:blipFill>
+          <a:blip r:embed="rId3">
+            <a:extLst>
+              <a:ext uri="{28A0092B-C50C-407E-A947-70E740481C1C}">
+                <a14:useLocalDpi xmlns:a14="http://schemas.microsoft.com/office/drawing/2010/main" val="0"/>
+              </a:ext>
+            </a:extLst>
+          </a:blip>
+          <a:stretch>
+            <a:fillRect/>
+          </a:stretch>
+        </p:blipFill>
+        <p:spPr>
+          <a:xfrm>
+            <a:off x="9149461" y="2586777"/>
+            <a:ext cx="2298168" cy="1962041"/>
+          </a:xfrm>
+          <a:prstGeom prst="rect">
+            <a:avLst/>
+          </a:prstGeom>
+        </p:spPr>
+      </p:pic>
+      <p:pic>
+        <p:nvPicPr>
+          <p:cNvPr id="6" name="Immagine 5" descr="Immagine che contiene schermata, Policromia, grafica, Elementi grafici&#10;&#10;Descrizione generata automaticamente">
+            <a:extLst>
+              <a:ext uri="{FF2B5EF4-FFF2-40B4-BE49-F238E27FC236}">
+                <a16:creationId xmlns:a16="http://schemas.microsoft.com/office/drawing/2014/main" id="{5B4083C8-4F0B-4D5B-4FC3-4D9607AC5C78}"/>
+              </a:ext>
+            </a:extLst>
+          </p:cNvPr>
+          <p:cNvPicPr>
+            <a:picLocks noChangeAspect="1"/>
+          </p:cNvPicPr>
+          <p:nvPr/>
+        </p:nvPicPr>
+        <p:blipFill rotWithShape="1">
+          <a:blip r:embed="rId4">
+            <a:extLst>
+              <a:ext uri="{28A0092B-C50C-407E-A947-70E740481C1C}">
+                <a14:useLocalDpi xmlns:a14="http://schemas.microsoft.com/office/drawing/2010/main" val="0"/>
+              </a:ext>
+            </a:extLst>
+          </a:blip>
+          <a:srcRect l="16822" t="3819" r="19840" b="14710"/>
+          <a:stretch/>
+        </p:blipFill>
+        <p:spPr bwMode="auto">
+          <a:xfrm>
+            <a:off x="4467770" y="4548820"/>
+            <a:ext cx="3447637" cy="2185122"/>
+          </a:xfrm>
+          <a:prstGeom prst="rect">
+            <a:avLst/>
+          </a:prstGeom>
+          <a:ln>
+            <a:noFill/>
+          </a:ln>
+          <a:extLst>
+            <a:ext uri="{53640926-AAD7-44D8-BBD7-CCE9431645EC}">
+              <a14:shadowObscured xmlns:a14="http://schemas.microsoft.com/office/drawing/2010/main"/>
+            </a:ext>
+          </a:extLst>
+        </p:spPr>
+      </p:pic>
+      <p:pic>
+        <p:nvPicPr>
+          <p:cNvPr id="8" name="Immagine 7" descr="Immagine che contiene testo, diagramma, Carattere, ricevuta&#10;&#10;Descrizione generata automaticamente">
+            <a:extLst>
+              <a:ext uri="{FF2B5EF4-FFF2-40B4-BE49-F238E27FC236}">
+                <a16:creationId xmlns:a16="http://schemas.microsoft.com/office/drawing/2014/main" id="{43FCAB66-941A-AFEB-4A0B-6BBA70AA89CE}"/>
+              </a:ext>
+            </a:extLst>
+          </p:cNvPr>
+          <p:cNvPicPr>
+            <a:picLocks noChangeAspect="1"/>
+          </p:cNvPicPr>
+          <p:nvPr/>
+        </p:nvPicPr>
+        <p:blipFill>
+          <a:blip r:embed="rId5">
+            <a:extLst>
+              <a:ext uri="{28A0092B-C50C-407E-A947-70E740481C1C}">
+                <a14:useLocalDpi xmlns:a14="http://schemas.microsoft.com/office/drawing/2010/main" val="0"/>
+              </a:ext>
+            </a:extLst>
+          </a:blip>
+          <a:stretch>
+            <a:fillRect/>
+          </a:stretch>
+        </p:blipFill>
+        <p:spPr>
+          <a:xfrm>
+            <a:off x="570726" y="2586777"/>
+            <a:ext cx="3049108" cy="1962041"/>
+          </a:xfrm>
+          <a:prstGeom prst="rect">
+            <a:avLst/>
+          </a:prstGeom>
+        </p:spPr>
+      </p:pic>
+      <p:pic>
+        <p:nvPicPr>
+          <p:cNvPr id="10" name="Immagine 9" descr="Immagine che contiene Modello in scala, motore&#10;&#10;Descrizione generata automaticamente">
+            <a:extLst>
+              <a:ext uri="{FF2B5EF4-FFF2-40B4-BE49-F238E27FC236}">
+                <a16:creationId xmlns:a16="http://schemas.microsoft.com/office/drawing/2014/main" id="{61881EE9-EDA6-B021-ED83-7482C43CAFC0}"/>
+              </a:ext>
+            </a:extLst>
+          </p:cNvPr>
+          <p:cNvPicPr>
+            <a:picLocks noChangeAspect="1"/>
+          </p:cNvPicPr>
+          <p:nvPr/>
+        </p:nvPicPr>
+        <p:blipFill>
+          <a:blip r:embed="rId6">
+            <a:alphaModFix/>
+            <a:extLst>
+              <a:ext uri="{28A0092B-C50C-407E-A947-70E740481C1C}">
+                <a14:useLocalDpi xmlns:a14="http://schemas.microsoft.com/office/drawing/2010/main" val="0"/>
+              </a:ext>
+            </a:extLst>
+          </a:blip>
+          <a:stretch>
+            <a:fillRect/>
+          </a:stretch>
+        </p:blipFill>
+        <p:spPr>
+          <a:xfrm>
+            <a:off x="4569032" y="2694472"/>
+            <a:ext cx="3053934" cy="1746654"/>
+          </a:xfrm>
+          <a:prstGeom prst="rect">
+            <a:avLst/>
+          </a:prstGeom>
+        </p:spPr>
+      </p:pic>
+      <p:cxnSp>
+        <p:nvCxnSpPr>
+          <p:cNvPr id="13" name="Connettore curvo 12">
+            <a:extLst>
+              <a:ext uri="{FF2B5EF4-FFF2-40B4-BE49-F238E27FC236}">
+                <a16:creationId xmlns:a16="http://schemas.microsoft.com/office/drawing/2014/main" id="{9E475B71-4D6F-32B7-7116-0C75108EF507}"/>
+              </a:ext>
+            </a:extLst>
+          </p:cNvPr>
+          <p:cNvCxnSpPr>
+            <a:stCxn id="4" idx="3"/>
+            <a:endCxn id="5" idx="0"/>
+          </p:cNvCxnSpPr>
+          <p:nvPr/>
+        </p:nvCxnSpPr>
+        <p:spPr>
+          <a:xfrm>
+            <a:off x="7915407" y="1713453"/>
+            <a:ext cx="2383138" cy="873324"/>
+          </a:xfrm>
+          <a:prstGeom prst="curvedConnector2">
+            <a:avLst/>
+          </a:prstGeom>
+          <a:ln>
+            <a:tailEnd type="triangle"/>
+          </a:ln>
+        </p:spPr>
+        <p:style>
+          <a:lnRef idx="2">
+            <a:schemeClr val="accent1"/>
+          </a:lnRef>
+          <a:fillRef idx="0">
+            <a:schemeClr val="accent1"/>
+          </a:fillRef>
+          <a:effectRef idx="1">
+            <a:schemeClr val="accent1"/>
+          </a:effectRef>
+          <a:fontRef idx="minor">
+            <a:schemeClr val="tx1"/>
+          </a:fontRef>
+        </p:style>
+      </p:cxnSp>
+      <p:cxnSp>
+        <p:nvCxnSpPr>
+          <p:cNvPr id="16" name="Connettore curvo 15">
+            <a:extLst>
+              <a:ext uri="{FF2B5EF4-FFF2-40B4-BE49-F238E27FC236}">
+                <a16:creationId xmlns:a16="http://schemas.microsoft.com/office/drawing/2014/main" id="{43902868-136D-3B6D-219D-580970825D24}"/>
+              </a:ext>
+            </a:extLst>
+          </p:cNvPr>
+          <p:cNvCxnSpPr>
+            <a:stCxn id="5" idx="2"/>
+            <a:endCxn id="6" idx="3"/>
+          </p:cNvCxnSpPr>
+          <p:nvPr/>
+        </p:nvCxnSpPr>
+        <p:spPr>
+          <a:xfrm rot="5400000">
+            <a:off x="8560695" y="3903530"/>
+            <a:ext cx="1092563" cy="2383138"/>
+          </a:xfrm>
+          <a:prstGeom prst="curvedConnector2">
+            <a:avLst/>
+          </a:prstGeom>
+          <a:ln>
+            <a:tailEnd type="triangle"/>
+          </a:ln>
+        </p:spPr>
+        <p:style>
+          <a:lnRef idx="2">
+            <a:schemeClr val="accent1"/>
+          </a:lnRef>
+          <a:fillRef idx="0">
+            <a:schemeClr val="accent1"/>
+          </a:fillRef>
+          <a:effectRef idx="1">
+            <a:schemeClr val="accent1"/>
+          </a:effectRef>
+          <a:fontRef idx="minor">
+            <a:schemeClr val="tx1"/>
+          </a:fontRef>
+        </p:style>
+      </p:cxnSp>
+      <p:cxnSp>
+        <p:nvCxnSpPr>
+          <p:cNvPr id="18" name="Connettore curvo 17">
+            <a:extLst>
+              <a:ext uri="{FF2B5EF4-FFF2-40B4-BE49-F238E27FC236}">
+                <a16:creationId xmlns:a16="http://schemas.microsoft.com/office/drawing/2014/main" id="{510309B1-0A29-281B-19AF-2A4B5F70140A}"/>
+              </a:ext>
+            </a:extLst>
+          </p:cNvPr>
+          <p:cNvCxnSpPr>
+            <a:stCxn id="6" idx="1"/>
+            <a:endCxn id="8" idx="2"/>
+          </p:cNvCxnSpPr>
+          <p:nvPr/>
+        </p:nvCxnSpPr>
+        <p:spPr>
+          <a:xfrm rot="10800000">
+            <a:off x="2095280" y="4548819"/>
+            <a:ext cx="2372490" cy="1092563"/>
+          </a:xfrm>
+          <a:prstGeom prst="curvedConnector2">
+            <a:avLst/>
+          </a:prstGeom>
+          <a:ln>
+            <a:tailEnd type="triangle"/>
+          </a:ln>
+        </p:spPr>
+        <p:style>
+          <a:lnRef idx="2">
+            <a:schemeClr val="accent1"/>
+          </a:lnRef>
+          <a:fillRef idx="0">
+            <a:schemeClr val="accent1"/>
+          </a:fillRef>
+          <a:effectRef idx="1">
+            <a:schemeClr val="accent1"/>
+          </a:effectRef>
+          <a:fontRef idx="minor">
+            <a:schemeClr val="tx1"/>
+          </a:fontRef>
+        </p:style>
+      </p:cxnSp>
+      <p:cxnSp>
+        <p:nvCxnSpPr>
+          <p:cNvPr id="20" name="Connettore curvo 19">
+            <a:extLst>
+              <a:ext uri="{FF2B5EF4-FFF2-40B4-BE49-F238E27FC236}">
+                <a16:creationId xmlns:a16="http://schemas.microsoft.com/office/drawing/2014/main" id="{9B86F27E-8B80-CAEF-D590-74658185D61B}"/>
+              </a:ext>
+            </a:extLst>
+          </p:cNvPr>
+          <p:cNvCxnSpPr>
+            <a:stCxn id="8" idx="0"/>
+            <a:endCxn id="4" idx="1"/>
+          </p:cNvCxnSpPr>
+          <p:nvPr/>
+        </p:nvCxnSpPr>
+        <p:spPr>
+          <a:xfrm rot="5400000" flipH="1" flipV="1">
+            <a:off x="2830091" y="978642"/>
+            <a:ext cx="873324" cy="2342946"/>
+          </a:xfrm>
+          <a:prstGeom prst="curvedConnector2">
+            <a:avLst/>
+          </a:prstGeom>
+          <a:ln>
+            <a:tailEnd type="triangle"/>
+          </a:ln>
+        </p:spPr>
+        <p:style>
+          <a:lnRef idx="2">
+            <a:schemeClr val="accent1"/>
+          </a:lnRef>
+          <a:fillRef idx="0">
+            <a:schemeClr val="accent1"/>
+          </a:fillRef>
+          <a:effectRef idx="1">
+            <a:schemeClr val="accent1"/>
+          </a:effectRef>
+          <a:fontRef idx="minor">
+            <a:schemeClr val="tx1"/>
+          </a:fontRef>
+        </p:style>
+      </p:cxnSp>
+    </p:spTree>
+    <p:extLst>
+      <p:ext uri="{BB962C8B-B14F-4D97-AF65-F5344CB8AC3E}">
+        <p14:creationId xmlns:p14="http://schemas.microsoft.com/office/powerpoint/2010/main" val="1747370267"/>
+      </p:ext>
+    </p:extLst>
+  </p:cSld>
+  <p:clrMapOvr>
+    <a:masterClrMapping/>
+  </p:clrMapOvr>
+  <mc:AlternateContent xmlns:mc="http://schemas.openxmlformats.org/markup-compatibility/2006" xmlns:p14="http://schemas.microsoft.com/office/powerpoint/2010/main">
+    <mc:Choice Requires="p14">
+      <p:transition spd="med" p14:dur="700">
+        <p:fade/>
+      </p:transition>
+    </mc:Choice>
+    <mc:Fallback xmlns="">
+      <p:transition spd="med">
+        <p:fade/>
+      </p:transition>
+    </mc:Fallback>
+  </mc:AlternateContent>
+</p:sld>
+</file>
+
+<file path=ppt/slides/slide14.xml><?xml version="1.0" encoding="utf-8"?>
+<p:sld xmlns:a="http://schemas.openxmlformats.org/drawingml/2006/main" xmlns:r="http://schemas.openxmlformats.org/officeDocument/2006/relationships" xmlns:p="http://schemas.openxmlformats.org/presentationml/2006/main">
+  <p:cSld>
+    <p:spTree>
+      <p:nvGrpSpPr>
+        <p:cNvPr id="1" name=""/>
+        <p:cNvGrpSpPr/>
+        <p:nvPr/>
+      </p:nvGrpSpPr>
+      <p:grpSpPr>
+        <a:xfrm>
+          <a:off x="0" y="0"/>
+          <a:ext cx="0" cy="0"/>
+          <a:chOff x="0" y="0"/>
+          <a:chExt cx="0" cy="0"/>
+        </a:xfrm>
+      </p:grpSpPr>
+      <p:sp>
+        <p:nvSpPr>
+          <p:cNvPr id="2" name="CasellaDiTesto 1">
+            <a:extLst>
+              <a:ext uri="{FF2B5EF4-FFF2-40B4-BE49-F238E27FC236}">
+                <a16:creationId xmlns:a16="http://schemas.microsoft.com/office/drawing/2014/main" id="{FF6A251C-6381-1380-8DBA-F85A797066DB}"/>
+              </a:ext>
+            </a:extLst>
+          </p:cNvPr>
+          <p:cNvSpPr txBox="1"/>
+          <p:nvPr/>
+        </p:nvSpPr>
+        <p:spPr>
+          <a:xfrm>
+            <a:off x="1431636" y="2921168"/>
+            <a:ext cx="9328727" cy="1015663"/>
+          </a:xfrm>
+          <a:prstGeom prst="rect">
+            <a:avLst/>
+          </a:prstGeom>
+          <a:noFill/>
+        </p:spPr>
+        <p:txBody>
+          <a:bodyPr wrap="square">
+            <a:spAutoFit/>
+          </a:bodyPr>
+          <a:lstStyle/>
+          <a:p>
+            <a:pPr algn="ctr"/>
+            <a:r>
+              <a:rPr lang="en-GB" sz="6000" dirty="0" err="1">
+                <a:latin typeface="Georgia" panose="02040502050405020303" pitchFamily="18" charset="0"/>
+                <a:ea typeface="Verdana" panose="020B0604030504040204" pitchFamily="34" charset="0"/>
+                <a:cs typeface="Tahoma" panose="020B0604030504040204" pitchFamily="34" charset="0"/>
+              </a:rPr>
+              <a:t>Grazie</a:t>
+            </a:r>
+            <a:r>
+              <a:rPr lang="en-GB" sz="6000" dirty="0">
+                <a:latin typeface="Georgia" panose="02040502050405020303" pitchFamily="18" charset="0"/>
+                <a:ea typeface="Verdana" panose="020B0604030504040204" pitchFamily="34" charset="0"/>
+                <a:cs typeface="Tahoma" panose="020B0604030504040204" pitchFamily="34" charset="0"/>
+              </a:rPr>
+              <a:t> </a:t>
+            </a:r>
+            <a:r>
+              <a:rPr lang="en-GB" sz="6000" dirty="0" err="1">
+                <a:latin typeface="Georgia" panose="02040502050405020303" pitchFamily="18" charset="0"/>
+                <a:ea typeface="Verdana" panose="020B0604030504040204" pitchFamily="34" charset="0"/>
+                <a:cs typeface="Tahoma" panose="020B0604030504040204" pitchFamily="34" charset="0"/>
+              </a:rPr>
+              <a:t>dell’attenzione</a:t>
+            </a:r>
+            <a:r>
+              <a:rPr lang="en-GB" sz="6000" dirty="0">
+                <a:latin typeface="Georgia" panose="02040502050405020303" pitchFamily="18" charset="0"/>
+                <a:ea typeface="Verdana" panose="020B0604030504040204" pitchFamily="34" charset="0"/>
+                <a:cs typeface="Tahoma" panose="020B0604030504040204" pitchFamily="34" charset="0"/>
+              </a:rPr>
+              <a:t>!</a:t>
+            </a:r>
+            <a:endParaRPr lang="it-IT" sz="6000" dirty="0">
+              <a:latin typeface="Georgia" panose="02040502050405020303" pitchFamily="18" charset="0"/>
+              <a:ea typeface="Verdana" panose="020B0604030504040204" pitchFamily="34" charset="0"/>
+              <a:cs typeface="Tahoma" panose="020B0604030504040204" pitchFamily="34" charset="0"/>
+            </a:endParaRPr>
+          </a:p>
+        </p:txBody>
+      </p:sp>
+    </p:spTree>
+    <p:extLst>
+      <p:ext uri="{BB962C8B-B14F-4D97-AF65-F5344CB8AC3E}">
+        <p14:creationId xmlns:p14="http://schemas.microsoft.com/office/powerpoint/2010/main" val="2386545820"/>
+      </p:ext>
+    </p:extLst>
+  </p:cSld>
+  <p:clrMapOvr>
+    <a:masterClrMapping/>
+  </p:clrMapOvr>
+  <mc:AlternateContent xmlns:mc="http://schemas.openxmlformats.org/markup-compatibility/2006" xmlns:p14="http://schemas.microsoft.com/office/powerpoint/2010/main">
+    <mc:Choice Requires="p14">
+      <p:transition spd="med" p14:dur="700">
+        <p:fade/>
+      </p:transition>
+    </mc:Choice>
+    <mc:Fallback xmlns="">
+      <p:transition spd="med">
+        <p:fade/>
+      </p:transition>
+    </mc:Fallback>
+  </mc:AlternateContent>
+</p:sld>
+</file>
+
 <file path=ppt/slides/slide2.xml><?xml version="1.0" encoding="utf-8"?>
 <p:sld xmlns:a="http://schemas.openxmlformats.org/drawingml/2006/main" xmlns:r="http://schemas.openxmlformats.org/officeDocument/2006/relationships" xmlns:p="http://schemas.openxmlformats.org/presentationml/2006/main">
   <p:cSld>
@@ -7998,7 +8554,7 @@
                 <a:latin typeface="Times New Roman" panose="02020603050405020304" pitchFamily="18" charset="0"/>
                 <a:ea typeface="Calibri" panose="020F0502020204030204" pitchFamily="34" charset="0"/>
               </a:rPr>
-              <a:t>γ ‘ crystal is the only way dislocation have to pass through this phase.</a:t>
+              <a:t>γ ‘ crystal is the only way dislocations have, to pass through this phase.</a:t>
             </a:r>
             <a:endParaRPr lang="it-IT" sz="1200" b="1" dirty="0"/>
           </a:p>
